--- a/docs/crosswalk/framework_deck_2026-09-02.pptx
+++ b/docs/crosswalk/framework_deck_2026-09-02.pptx
@@ -3989,7 +3989,7 @@
                   <a:srgbClr val="000000"/>
                 </a:solidFill>
               </a:rPr>
-              <a:t>Every indicator is citable to primary literature through a knowledge graph: 194 documents admitted with reasons and content hashes; 35 extracted under the version-pinned v038 profile across 1,198 chunks, putting 10,305 nodes and 11,914 edges into the live graph (18,844 nodes and 22,141 edges across all extraction epochs).</a:t>
+              <a:t>Every indicator is citable to primary literature through a knowledge graph: 211 documents admitted with reasons and content hashes (17 of them G1-EVAL prior-art sources admitted 2026-09-02, not yet extracted); 35 of the 211 extracted under the version-pinned v038 profile across 1,198 chunks, putting 10,305 nodes and 11,914 edges into the live graph (18,844 non-document nodes and 22,141 edges across all extraction epochs, plus 211 document nodes).</a:t>
             </a:r>
           </a:p>
           <a:p>
